--- a/사용자 인터페이스 스케치.pptx
+++ b/사용자 인터페이스 스케치.pptx
@@ -14,8 +14,7 @@
     <p:sldId id="261" r:id="rId8"/>
     <p:sldId id="269" r:id="rId9"/>
     <p:sldId id="270" r:id="rId10"/>
-    <p:sldId id="271" r:id="rId11"/>
-    <p:sldId id="272" r:id="rId12"/>
+    <p:sldId id="272" r:id="rId11"/>
   </p:sldIdLst>
   <p:sldSz cx="9144000" cy="6858000" type="screen4x3"/>
   <p:notesSz cx="6858000" cy="9144000"/>
@@ -144,7 +143,6 @@
           <p14:sldIdLst>
             <p14:sldId id="269"/>
             <p14:sldId id="270"/>
-            <p14:sldId id="271"/>
             <p14:sldId id="272"/>
           </p14:sldIdLst>
         </p14:section>
@@ -4583,8 +4581,8 @@
         </p:nvSpPr>
         <p:spPr>
           <a:xfrm>
-            <a:off x="2182977" y="1182563"/>
-            <a:ext cx="5396608" cy="553998"/>
+            <a:off x="2886332" y="1182563"/>
+            <a:ext cx="3683303" cy="553998"/>
           </a:xfrm>
           <a:prstGeom prst="rect">
             <a:avLst/>
@@ -4612,44 +4610,25 @@
             <a:pPr algn="ctr"/>
             <a:r>
               <a:rPr lang="en-US" altLang="ko-KR" sz="1200" dirty="0"/>
-              <a:t>2017</a:t>
+              <a:t>2023</a:t>
             </a:r>
             <a:r>
               <a:rPr lang="ko-KR" altLang="en-US" sz="1200" dirty="0"/>
-              <a:t>년 대비 </a:t>
+              <a:t>년 전세계 총 탄소배출 규모</a:t>
             </a:r>
             <a:r>
               <a:rPr lang="en-US" altLang="ko-KR" sz="1200" dirty="0"/>
-              <a:t>2023</a:t>
+              <a:t>(Mt)</a:t>
             </a:r>
             <a:r>
               <a:rPr lang="ko-KR" altLang="en-US" sz="1200" dirty="0"/>
-              <a:t>년 국가</a:t>
+              <a:t> 및 비율</a:t>
             </a:r>
             <a:r>
               <a:rPr lang="en-US" altLang="ko-KR" sz="1200" dirty="0"/>
-              <a:t>(</a:t>
-            </a:r>
-            <a:r>
-              <a:rPr lang="ko-KR" altLang="en-US" sz="1200" dirty="0"/>
-              <a:t>그룹</a:t>
-            </a:r>
-            <a:r>
-              <a:rPr lang="en-US" altLang="ko-KR" sz="1200" dirty="0"/>
-              <a:t>)</a:t>
-            </a:r>
-            <a:r>
-              <a:rPr lang="ko-KR" altLang="en-US" sz="1200" dirty="0"/>
-              <a:t>별 이산화탄소</a:t>
-            </a:r>
-            <a:r>
-              <a:rPr lang="en-US" altLang="ko-KR" sz="1200" dirty="0"/>
-              <a:t>(CO2)</a:t>
-            </a:r>
-            <a:r>
-              <a:rPr lang="ko-KR" altLang="en-US" sz="1200" dirty="0"/>
-              <a:t>배출 연료원별 양방향 증감</a:t>
-            </a:r>
+              <a:t>(%)</a:t>
+            </a:r>
+            <a:endParaRPr lang="ko-KR" altLang="en-US" sz="1200" dirty="0"/>
           </a:p>
         </p:txBody>
       </p:sp>
@@ -4696,10 +4675,423 @@
       </p:sp>
       <p:sp>
         <p:nvSpPr>
-          <p:cNvPr id="34" name="TextBox 33">
-            <a:extLst>
-              <a:ext uri="{FF2B5EF4-FFF2-40B4-BE49-F238E27FC236}">
-                <a16:creationId xmlns:a16="http://schemas.microsoft.com/office/drawing/2014/main" id="{AABFDD26-C717-4B2E-B0E1-540A54C1B296}"/>
+          <p:cNvPr id="19" name="사각형: 둥근 모서리 18">
+            <a:extLst>
+              <a:ext uri="{FF2B5EF4-FFF2-40B4-BE49-F238E27FC236}">
+                <a16:creationId xmlns:a16="http://schemas.microsoft.com/office/drawing/2014/main" id="{56F193DD-5E49-4309-8461-E4677DAB0C4C}"/>
+              </a:ext>
+            </a:extLst>
+          </p:cNvPr>
+          <p:cNvSpPr/>
+          <p:nvPr/>
+        </p:nvSpPr>
+        <p:spPr>
+          <a:xfrm>
+            <a:off x="680516" y="2583854"/>
+            <a:ext cx="473241" cy="152489"/>
+          </a:xfrm>
+          <a:prstGeom prst="roundRect">
+            <a:avLst/>
+          </a:prstGeom>
+          <a:noFill/>
+        </p:spPr>
+        <p:style>
+          <a:lnRef idx="2">
+            <a:schemeClr val="accent1">
+              <a:shade val="50000"/>
+            </a:schemeClr>
+          </a:lnRef>
+          <a:fillRef idx="1">
+            <a:schemeClr val="accent1"/>
+          </a:fillRef>
+          <a:effectRef idx="0">
+            <a:schemeClr val="accent1"/>
+          </a:effectRef>
+          <a:fontRef idx="minor">
+            <a:schemeClr val="lt1"/>
+          </a:fontRef>
+        </p:style>
+        <p:txBody>
+          <a:bodyPr rtlCol="0" anchor="ctr"/>
+          <a:lstStyle/>
+          <a:p>
+            <a:pPr algn="ctr"/>
+            <a:r>
+              <a:rPr lang="en-US" altLang="ko-KR" sz="1000" dirty="0">
+                <a:solidFill>
+                  <a:schemeClr val="tx1"/>
+                </a:solidFill>
+              </a:rPr>
+              <a:t>2017</a:t>
+            </a:r>
+            <a:endParaRPr lang="ko-KR" altLang="en-US" sz="1000" dirty="0">
+              <a:solidFill>
+                <a:schemeClr val="tx1"/>
+              </a:solidFill>
+            </a:endParaRPr>
+          </a:p>
+        </p:txBody>
+      </p:sp>
+      <p:sp>
+        <p:nvSpPr>
+          <p:cNvPr id="20" name="사각형: 둥근 모서리 19">
+            <a:extLst>
+              <a:ext uri="{FF2B5EF4-FFF2-40B4-BE49-F238E27FC236}">
+                <a16:creationId xmlns:a16="http://schemas.microsoft.com/office/drawing/2014/main" id="{7A33B90A-B476-4628-8225-3E0102BA80F7}"/>
+              </a:ext>
+            </a:extLst>
+          </p:cNvPr>
+          <p:cNvSpPr/>
+          <p:nvPr/>
+        </p:nvSpPr>
+        <p:spPr>
+          <a:xfrm>
+            <a:off x="1217926" y="2583854"/>
+            <a:ext cx="473241" cy="152489"/>
+          </a:xfrm>
+          <a:prstGeom prst="roundRect">
+            <a:avLst/>
+          </a:prstGeom>
+          <a:noFill/>
+        </p:spPr>
+        <p:style>
+          <a:lnRef idx="2">
+            <a:schemeClr val="accent1">
+              <a:shade val="50000"/>
+            </a:schemeClr>
+          </a:lnRef>
+          <a:fillRef idx="1">
+            <a:schemeClr val="accent1"/>
+          </a:fillRef>
+          <a:effectRef idx="0">
+            <a:schemeClr val="accent1"/>
+          </a:effectRef>
+          <a:fontRef idx="minor">
+            <a:schemeClr val="lt1"/>
+          </a:fontRef>
+        </p:style>
+        <p:txBody>
+          <a:bodyPr rtlCol="0" anchor="ctr"/>
+          <a:lstStyle/>
+          <a:p>
+            <a:pPr algn="ctr"/>
+            <a:r>
+              <a:rPr lang="en-US" altLang="ko-KR" sz="1000" dirty="0">
+                <a:solidFill>
+                  <a:schemeClr val="tx1"/>
+                </a:solidFill>
+              </a:rPr>
+              <a:t>2018</a:t>
+            </a:r>
+            <a:endParaRPr lang="ko-KR" altLang="en-US" sz="1000" dirty="0">
+              <a:solidFill>
+                <a:schemeClr val="tx1"/>
+              </a:solidFill>
+            </a:endParaRPr>
+          </a:p>
+        </p:txBody>
+      </p:sp>
+      <p:sp>
+        <p:nvSpPr>
+          <p:cNvPr id="21" name="사각형: 둥근 모서리 20">
+            <a:extLst>
+              <a:ext uri="{FF2B5EF4-FFF2-40B4-BE49-F238E27FC236}">
+                <a16:creationId xmlns:a16="http://schemas.microsoft.com/office/drawing/2014/main" id="{CD5F2512-5A50-4358-9A5D-CCB6998AC996}"/>
+              </a:ext>
+            </a:extLst>
+          </p:cNvPr>
+          <p:cNvSpPr/>
+          <p:nvPr/>
+        </p:nvSpPr>
+        <p:spPr>
+          <a:xfrm>
+            <a:off x="1755336" y="2583854"/>
+            <a:ext cx="473241" cy="152489"/>
+          </a:xfrm>
+          <a:prstGeom prst="roundRect">
+            <a:avLst/>
+          </a:prstGeom>
+          <a:noFill/>
+        </p:spPr>
+        <p:style>
+          <a:lnRef idx="2">
+            <a:schemeClr val="accent1">
+              <a:shade val="50000"/>
+            </a:schemeClr>
+          </a:lnRef>
+          <a:fillRef idx="1">
+            <a:schemeClr val="accent1"/>
+          </a:fillRef>
+          <a:effectRef idx="0">
+            <a:schemeClr val="accent1"/>
+          </a:effectRef>
+          <a:fontRef idx="minor">
+            <a:schemeClr val="lt1"/>
+          </a:fontRef>
+        </p:style>
+        <p:txBody>
+          <a:bodyPr rtlCol="0" anchor="ctr"/>
+          <a:lstStyle/>
+          <a:p>
+            <a:pPr algn="ctr"/>
+            <a:r>
+              <a:rPr lang="en-US" altLang="ko-KR" sz="1000" dirty="0">
+                <a:solidFill>
+                  <a:schemeClr val="tx1"/>
+                </a:solidFill>
+              </a:rPr>
+              <a:t>2019</a:t>
+            </a:r>
+            <a:endParaRPr lang="ko-KR" altLang="en-US" sz="1000" dirty="0">
+              <a:solidFill>
+                <a:schemeClr val="tx1"/>
+              </a:solidFill>
+            </a:endParaRPr>
+          </a:p>
+        </p:txBody>
+      </p:sp>
+      <p:sp>
+        <p:nvSpPr>
+          <p:cNvPr id="22" name="사각형: 둥근 모서리 21">
+            <a:extLst>
+              <a:ext uri="{FF2B5EF4-FFF2-40B4-BE49-F238E27FC236}">
+                <a16:creationId xmlns:a16="http://schemas.microsoft.com/office/drawing/2014/main" id="{D55B95F7-B271-4498-B717-A6EC704F2E04}"/>
+              </a:ext>
+            </a:extLst>
+          </p:cNvPr>
+          <p:cNvSpPr/>
+          <p:nvPr/>
+        </p:nvSpPr>
+        <p:spPr>
+          <a:xfrm>
+            <a:off x="2292746" y="2583854"/>
+            <a:ext cx="473241" cy="152489"/>
+          </a:xfrm>
+          <a:prstGeom prst="roundRect">
+            <a:avLst/>
+          </a:prstGeom>
+          <a:noFill/>
+        </p:spPr>
+        <p:style>
+          <a:lnRef idx="2">
+            <a:schemeClr val="accent1">
+              <a:shade val="50000"/>
+            </a:schemeClr>
+          </a:lnRef>
+          <a:fillRef idx="1">
+            <a:schemeClr val="accent1"/>
+          </a:fillRef>
+          <a:effectRef idx="0">
+            <a:schemeClr val="accent1"/>
+          </a:effectRef>
+          <a:fontRef idx="minor">
+            <a:schemeClr val="lt1"/>
+          </a:fontRef>
+        </p:style>
+        <p:txBody>
+          <a:bodyPr rtlCol="0" anchor="ctr"/>
+          <a:lstStyle/>
+          <a:p>
+            <a:pPr algn="ctr"/>
+            <a:r>
+              <a:rPr lang="en-US" altLang="ko-KR" sz="1000" dirty="0">
+                <a:solidFill>
+                  <a:schemeClr val="tx1"/>
+                </a:solidFill>
+              </a:rPr>
+              <a:t>2020</a:t>
+            </a:r>
+            <a:endParaRPr lang="ko-KR" altLang="en-US" sz="1000" dirty="0">
+              <a:solidFill>
+                <a:schemeClr val="tx1"/>
+              </a:solidFill>
+            </a:endParaRPr>
+          </a:p>
+        </p:txBody>
+      </p:sp>
+      <p:sp>
+        <p:nvSpPr>
+          <p:cNvPr id="29" name="사각형: 둥근 모서리 28">
+            <a:extLst>
+              <a:ext uri="{FF2B5EF4-FFF2-40B4-BE49-F238E27FC236}">
+                <a16:creationId xmlns:a16="http://schemas.microsoft.com/office/drawing/2014/main" id="{7637B932-0B5A-423E-A618-418A59609527}"/>
+              </a:ext>
+            </a:extLst>
+          </p:cNvPr>
+          <p:cNvSpPr/>
+          <p:nvPr/>
+        </p:nvSpPr>
+        <p:spPr>
+          <a:xfrm>
+            <a:off x="2830156" y="2583854"/>
+            <a:ext cx="473241" cy="152489"/>
+          </a:xfrm>
+          <a:prstGeom prst="roundRect">
+            <a:avLst/>
+          </a:prstGeom>
+          <a:noFill/>
+        </p:spPr>
+        <p:style>
+          <a:lnRef idx="2">
+            <a:schemeClr val="accent1">
+              <a:shade val="50000"/>
+            </a:schemeClr>
+          </a:lnRef>
+          <a:fillRef idx="1">
+            <a:schemeClr val="accent1"/>
+          </a:fillRef>
+          <a:effectRef idx="0">
+            <a:schemeClr val="accent1"/>
+          </a:effectRef>
+          <a:fontRef idx="minor">
+            <a:schemeClr val="lt1"/>
+          </a:fontRef>
+        </p:style>
+        <p:txBody>
+          <a:bodyPr rtlCol="0" anchor="ctr"/>
+          <a:lstStyle/>
+          <a:p>
+            <a:pPr algn="ctr"/>
+            <a:r>
+              <a:rPr lang="en-US" altLang="ko-KR" sz="1000" dirty="0">
+                <a:solidFill>
+                  <a:schemeClr val="tx1"/>
+                </a:solidFill>
+              </a:rPr>
+              <a:t>2021</a:t>
+            </a:r>
+            <a:endParaRPr lang="ko-KR" altLang="en-US" sz="1000" dirty="0">
+              <a:solidFill>
+                <a:schemeClr val="tx1"/>
+              </a:solidFill>
+            </a:endParaRPr>
+          </a:p>
+        </p:txBody>
+      </p:sp>
+      <p:sp>
+        <p:nvSpPr>
+          <p:cNvPr id="31" name="사각형: 둥근 모서리 30">
+            <a:extLst>
+              <a:ext uri="{FF2B5EF4-FFF2-40B4-BE49-F238E27FC236}">
+                <a16:creationId xmlns:a16="http://schemas.microsoft.com/office/drawing/2014/main" id="{EC1735A1-FB56-4FCD-B448-75FFEBA3D77D}"/>
+              </a:ext>
+            </a:extLst>
+          </p:cNvPr>
+          <p:cNvSpPr/>
+          <p:nvPr/>
+        </p:nvSpPr>
+        <p:spPr>
+          <a:xfrm>
+            <a:off x="3367566" y="2583854"/>
+            <a:ext cx="473241" cy="152489"/>
+          </a:xfrm>
+          <a:prstGeom prst="roundRect">
+            <a:avLst/>
+          </a:prstGeom>
+          <a:noFill/>
+        </p:spPr>
+        <p:style>
+          <a:lnRef idx="2">
+            <a:schemeClr val="accent1">
+              <a:shade val="50000"/>
+            </a:schemeClr>
+          </a:lnRef>
+          <a:fillRef idx="1">
+            <a:schemeClr val="accent1"/>
+          </a:fillRef>
+          <a:effectRef idx="0">
+            <a:schemeClr val="accent1"/>
+          </a:effectRef>
+          <a:fontRef idx="minor">
+            <a:schemeClr val="lt1"/>
+          </a:fontRef>
+        </p:style>
+        <p:txBody>
+          <a:bodyPr rtlCol="0" anchor="ctr"/>
+          <a:lstStyle/>
+          <a:p>
+            <a:pPr algn="ctr"/>
+            <a:r>
+              <a:rPr lang="en-US" altLang="ko-KR" sz="1000" dirty="0">
+                <a:solidFill>
+                  <a:schemeClr val="tx1"/>
+                </a:solidFill>
+              </a:rPr>
+              <a:t>2022</a:t>
+            </a:r>
+            <a:endParaRPr lang="ko-KR" altLang="en-US" sz="1000" dirty="0">
+              <a:solidFill>
+                <a:schemeClr val="tx1"/>
+              </a:solidFill>
+            </a:endParaRPr>
+          </a:p>
+        </p:txBody>
+      </p:sp>
+      <p:sp>
+        <p:nvSpPr>
+          <p:cNvPr id="32" name="사각형: 둥근 모서리 31">
+            <a:extLst>
+              <a:ext uri="{FF2B5EF4-FFF2-40B4-BE49-F238E27FC236}">
+                <a16:creationId xmlns:a16="http://schemas.microsoft.com/office/drawing/2014/main" id="{F2F56303-A59D-489B-9F79-47417E983A8C}"/>
+              </a:ext>
+            </a:extLst>
+          </p:cNvPr>
+          <p:cNvSpPr/>
+          <p:nvPr/>
+        </p:nvSpPr>
+        <p:spPr>
+          <a:xfrm>
+            <a:off x="3904976" y="2583854"/>
+            <a:ext cx="473241" cy="152489"/>
+          </a:xfrm>
+          <a:prstGeom prst="roundRect">
+            <a:avLst/>
+          </a:prstGeom>
+          <a:noFill/>
+        </p:spPr>
+        <p:style>
+          <a:lnRef idx="2">
+            <a:schemeClr val="accent1">
+              <a:shade val="50000"/>
+            </a:schemeClr>
+          </a:lnRef>
+          <a:fillRef idx="1">
+            <a:schemeClr val="accent1"/>
+          </a:fillRef>
+          <a:effectRef idx="0">
+            <a:schemeClr val="accent1"/>
+          </a:effectRef>
+          <a:fontRef idx="minor">
+            <a:schemeClr val="lt1"/>
+          </a:fontRef>
+        </p:style>
+        <p:txBody>
+          <a:bodyPr rtlCol="0" anchor="ctr"/>
+          <a:lstStyle/>
+          <a:p>
+            <a:pPr algn="ctr"/>
+            <a:r>
+              <a:rPr lang="en-US" altLang="ko-KR" sz="1000" dirty="0">
+                <a:solidFill>
+                  <a:schemeClr val="tx1"/>
+                </a:solidFill>
+              </a:rPr>
+              <a:t>2023</a:t>
+            </a:r>
+            <a:endParaRPr lang="ko-KR" altLang="en-US" sz="1000" dirty="0">
+              <a:solidFill>
+                <a:schemeClr val="tx1"/>
+              </a:solidFill>
+            </a:endParaRPr>
+          </a:p>
+        </p:txBody>
+      </p:sp>
+      <p:sp>
+        <p:nvSpPr>
+          <p:cNvPr id="33" name="TextBox 32">
+            <a:extLst>
+              <a:ext uri="{FF2B5EF4-FFF2-40B4-BE49-F238E27FC236}">
+                <a16:creationId xmlns:a16="http://schemas.microsoft.com/office/drawing/2014/main" id="{EF65E1B6-B51A-4FEA-82B7-D841D6A39DB8}"/>
               </a:ext>
             </a:extLst>
           </p:cNvPr>
@@ -4708,8 +5100,132 @@
         </p:nvSpPr>
         <p:spPr>
           <a:xfrm>
-            <a:off x="3348480" y="1944273"/>
-            <a:ext cx="1112992" cy="253916"/>
+            <a:off x="624368" y="2326648"/>
+            <a:ext cx="895291" cy="253916"/>
+          </a:xfrm>
+          <a:prstGeom prst="rect">
+            <a:avLst/>
+          </a:prstGeom>
+          <a:noFill/>
+        </p:spPr>
+        <p:txBody>
+          <a:bodyPr wrap="square" rtlCol="0">
+            <a:spAutoFit/>
+          </a:bodyPr>
+          <a:lstStyle/>
+          <a:p>
+            <a:r>
+              <a:rPr lang="ko-KR" altLang="en-US" sz="1050" dirty="0"/>
+              <a:t>기준 연도</a:t>
+            </a:r>
+          </a:p>
+        </p:txBody>
+      </p:sp>
+      <p:pic>
+        <p:nvPicPr>
+          <p:cNvPr id="3" name="그림 2">
+            <a:extLst>
+              <a:ext uri="{FF2B5EF4-FFF2-40B4-BE49-F238E27FC236}">
+                <a16:creationId xmlns:a16="http://schemas.microsoft.com/office/drawing/2014/main" id="{212122FB-B0DC-4E8F-AF8A-B5B563A9FA1E}"/>
+              </a:ext>
+            </a:extLst>
+          </p:cNvPr>
+          <p:cNvPicPr>
+            <a:picLocks noChangeAspect="1"/>
+          </p:cNvPicPr>
+          <p:nvPr/>
+        </p:nvPicPr>
+        <p:blipFill>
+          <a:blip r:embed="rId2">
+            <a:extLst>
+              <a:ext uri="{28A0092B-C50C-407E-A947-70E740481C1C}">
+                <a14:useLocalDpi xmlns:a14="http://schemas.microsoft.com/office/drawing/2010/main" val="0"/>
+              </a:ext>
+            </a:extLst>
+          </a:blip>
+          <a:stretch>
+            <a:fillRect/>
+          </a:stretch>
+        </p:blipFill>
+        <p:spPr>
+          <a:xfrm>
+            <a:off x="2609575" y="2781841"/>
+            <a:ext cx="3703794" cy="2777846"/>
+          </a:xfrm>
+          <a:prstGeom prst="rect">
+            <a:avLst/>
+          </a:prstGeom>
+        </p:spPr>
+      </p:pic>
+      <p:sp>
+        <p:nvSpPr>
+          <p:cNvPr id="23" name="사각형: 둥근 모서리 22">
+            <a:extLst>
+              <a:ext uri="{FF2B5EF4-FFF2-40B4-BE49-F238E27FC236}">
+                <a16:creationId xmlns:a16="http://schemas.microsoft.com/office/drawing/2014/main" id="{961E67BE-5F5C-41C4-AE11-052887FDB763}"/>
+              </a:ext>
+            </a:extLst>
+          </p:cNvPr>
+          <p:cNvSpPr/>
+          <p:nvPr/>
+        </p:nvSpPr>
+        <p:spPr>
+          <a:xfrm>
+            <a:off x="5728446" y="479376"/>
+            <a:ext cx="1355464" cy="314661"/>
+          </a:xfrm>
+          <a:prstGeom prst="roundRect">
+            <a:avLst/>
+          </a:prstGeom>
+        </p:spPr>
+        <p:style>
+          <a:lnRef idx="2">
+            <a:schemeClr val="accent1">
+              <a:shade val="50000"/>
+            </a:schemeClr>
+          </a:lnRef>
+          <a:fillRef idx="1">
+            <a:schemeClr val="accent1"/>
+          </a:fillRef>
+          <a:effectRef idx="0">
+            <a:schemeClr val="accent1"/>
+          </a:effectRef>
+          <a:fontRef idx="minor">
+            <a:schemeClr val="lt1"/>
+          </a:fontRef>
+        </p:style>
+        <p:txBody>
+          <a:bodyPr rtlCol="0" anchor="ctr"/>
+          <a:lstStyle/>
+          <a:p>
+            <a:pPr algn="ctr"/>
+            <a:r>
+              <a:rPr lang="en-US" altLang="ko-KR" sz="1050" dirty="0"/>
+              <a:t>4.</a:t>
+            </a:r>
+            <a:r>
+              <a:rPr lang="ko-KR" altLang="en-US" sz="1050" dirty="0"/>
+              <a:t> 연평균 재생에너지 이용률</a:t>
+            </a:r>
+          </a:p>
+        </p:txBody>
+      </p:sp>
+      <p:sp>
+        <p:nvSpPr>
+          <p:cNvPr id="24" name="TextBox 23">
+            <a:extLst>
+              <a:ext uri="{FF2B5EF4-FFF2-40B4-BE49-F238E27FC236}">
+                <a16:creationId xmlns:a16="http://schemas.microsoft.com/office/drawing/2014/main" id="{A5ACB937-7A1B-46CE-8336-DAB134233968}"/>
+              </a:ext>
+            </a:extLst>
+          </p:cNvPr>
+          <p:cNvSpPr txBox="1"/>
+          <p:nvPr/>
+        </p:nvSpPr>
+        <p:spPr>
+          <a:xfrm>
+            <a:off x="3367566" y="1944273"/>
+            <a:ext cx="1263512" cy="253916"/>
           </a:xfrm>
           <a:prstGeom prst="rect">
             <a:avLst/>
@@ -4733,1251 +5249,10 @@
           <a:p>
             <a:pPr algn="ctr"/>
             <a:r>
-              <a:rPr lang="ko-KR" altLang="en-US" sz="1050" dirty="0"/>
-              <a:t>배출 </a:t>
-            </a:r>
-            <a:r>
-              <a:rPr lang="ko-KR" altLang="en-US" sz="1050" dirty="0" err="1"/>
-              <a:t>증감량</a:t>
-            </a:r>
-            <a:endParaRPr lang="ko-KR" altLang="en-US" sz="1050" dirty="0"/>
-          </a:p>
-        </p:txBody>
-      </p:sp>
-      <p:sp>
-        <p:nvSpPr>
-          <p:cNvPr id="36" name="TextBox 35">
-            <a:extLst>
-              <a:ext uri="{FF2B5EF4-FFF2-40B4-BE49-F238E27FC236}">
-                <a16:creationId xmlns:a16="http://schemas.microsoft.com/office/drawing/2014/main" id="{C3923473-5773-4BE8-88E2-91203489BF82}"/>
-              </a:ext>
-            </a:extLst>
-          </p:cNvPr>
-          <p:cNvSpPr txBox="1"/>
-          <p:nvPr/>
-        </p:nvSpPr>
-        <p:spPr>
-          <a:xfrm>
-            <a:off x="4596851" y="1944273"/>
-            <a:ext cx="1263512" cy="253916"/>
-          </a:xfrm>
-          <a:prstGeom prst="rect">
-            <a:avLst/>
-          </a:prstGeom>
-          <a:noFill/>
-          <a:ln>
-            <a:solidFill>
-              <a:schemeClr val="tx1"/>
-            </a:solidFill>
-          </a:ln>
-        </p:spPr>
-        <p:txBody>
-          <a:bodyPr wrap="square" rtlCol="0">
-            <a:spAutoFit/>
-          </a:bodyPr>
-          <a:lstStyle/>
-          <a:p>
-            <a:pPr algn="ctr"/>
-            <a:r>
               <a:rPr lang="ko-KR" altLang="en-US" sz="1050"/>
               <a:t>배출규모 점유율</a:t>
             </a:r>
             <a:endParaRPr lang="ko-KR" altLang="en-US" sz="1050" dirty="0"/>
-          </a:p>
-        </p:txBody>
-      </p:sp>
-      <p:pic>
-        <p:nvPicPr>
-          <p:cNvPr id="13" name="그림 12">
-            <a:extLst>
-              <a:ext uri="{FF2B5EF4-FFF2-40B4-BE49-F238E27FC236}">
-                <a16:creationId xmlns:a16="http://schemas.microsoft.com/office/drawing/2014/main" id="{6075EAFC-BCC9-4A26-939F-76E09726387C}"/>
-              </a:ext>
-            </a:extLst>
-          </p:cNvPr>
-          <p:cNvPicPr>
-            <a:picLocks noChangeAspect="1"/>
-          </p:cNvPicPr>
-          <p:nvPr/>
-        </p:nvPicPr>
-        <p:blipFill>
-          <a:blip r:embed="rId2">
-            <a:extLst>
-              <a:ext uri="{28A0092B-C50C-407E-A947-70E740481C1C}">
-                <a14:useLocalDpi xmlns:a14="http://schemas.microsoft.com/office/drawing/2010/main" val="0"/>
-              </a:ext>
-            </a:extLst>
-          </a:blip>
-          <a:stretch>
-            <a:fillRect/>
-          </a:stretch>
-        </p:blipFill>
-        <p:spPr>
-          <a:xfrm>
-            <a:off x="2384695" y="2477216"/>
-            <a:ext cx="4424312" cy="2815471"/>
-          </a:xfrm>
-          <a:prstGeom prst="rect">
-            <a:avLst/>
-          </a:prstGeom>
-        </p:spPr>
-      </p:pic>
-      <p:sp>
-        <p:nvSpPr>
-          <p:cNvPr id="15" name="사각형: 둥근 모서리 14">
-            <a:extLst>
-              <a:ext uri="{FF2B5EF4-FFF2-40B4-BE49-F238E27FC236}">
-                <a16:creationId xmlns:a16="http://schemas.microsoft.com/office/drawing/2014/main" id="{C97D532D-95AA-49E2-95A1-B3CFE5F803D0}"/>
-              </a:ext>
-            </a:extLst>
-          </p:cNvPr>
-          <p:cNvSpPr/>
-          <p:nvPr/>
-        </p:nvSpPr>
-        <p:spPr>
-          <a:xfrm>
-            <a:off x="5728446" y="479376"/>
-            <a:ext cx="1355464" cy="314661"/>
-          </a:xfrm>
-          <a:prstGeom prst="roundRect">
-            <a:avLst/>
-          </a:prstGeom>
-        </p:spPr>
-        <p:style>
-          <a:lnRef idx="2">
-            <a:schemeClr val="accent1">
-              <a:shade val="50000"/>
-            </a:schemeClr>
-          </a:lnRef>
-          <a:fillRef idx="1">
-            <a:schemeClr val="accent1"/>
-          </a:fillRef>
-          <a:effectRef idx="0">
-            <a:schemeClr val="accent1"/>
-          </a:effectRef>
-          <a:fontRef idx="minor">
-            <a:schemeClr val="lt1"/>
-          </a:fontRef>
-        </p:style>
-        <p:txBody>
-          <a:bodyPr rtlCol="0" anchor="ctr"/>
-          <a:lstStyle/>
-          <a:p>
-            <a:pPr algn="ctr"/>
-            <a:r>
-              <a:rPr lang="en-US" altLang="ko-KR" sz="1050" dirty="0"/>
-              <a:t>4.</a:t>
-            </a:r>
-            <a:r>
-              <a:rPr lang="ko-KR" altLang="en-US" sz="1050" dirty="0"/>
-              <a:t> 연평균 재생에너지 이용률</a:t>
-            </a:r>
-          </a:p>
-        </p:txBody>
-      </p:sp>
-    </p:spTree>
-    <p:extLst>
-      <p:ext uri="{BB962C8B-B14F-4D97-AF65-F5344CB8AC3E}">
-        <p14:creationId xmlns:p14="http://schemas.microsoft.com/office/powerpoint/2010/main" val="822790706"/>
-      </p:ext>
-    </p:extLst>
-  </p:cSld>
-  <p:clrMapOvr>
-    <a:masterClrMapping/>
-  </p:clrMapOvr>
-</p:sld>
-</file>
-
-<file path=ppt/slides/slide11.xml><?xml version="1.0" encoding="utf-8"?>
-<p:sld xmlns:a="http://schemas.openxmlformats.org/drawingml/2006/main" xmlns:r="http://schemas.openxmlformats.org/officeDocument/2006/relationships" xmlns:p="http://schemas.openxmlformats.org/presentationml/2006/main">
-  <p:cSld>
-    <p:spTree>
-      <p:nvGrpSpPr>
-        <p:cNvPr id="1" name=""/>
-        <p:cNvGrpSpPr/>
-        <p:nvPr/>
-      </p:nvGrpSpPr>
-      <p:grpSpPr>
-        <a:xfrm>
-          <a:off x="0" y="0"/>
-          <a:ext cx="0" cy="0"/>
-          <a:chOff x="0" y="0"/>
-          <a:chExt cx="0" cy="0"/>
-        </a:xfrm>
-      </p:grpSpPr>
-      <p:sp>
-        <p:nvSpPr>
-          <p:cNvPr id="4" name="사각형: 둥근 모서리 3">
-            <a:extLst>
-              <a:ext uri="{FF2B5EF4-FFF2-40B4-BE49-F238E27FC236}">
-                <a16:creationId xmlns:a16="http://schemas.microsoft.com/office/drawing/2014/main" id="{2C623425-8ABB-4197-955C-907C210676D2}"/>
-              </a:ext>
-            </a:extLst>
-          </p:cNvPr>
-          <p:cNvSpPr/>
-          <p:nvPr/>
-        </p:nvSpPr>
-        <p:spPr>
-          <a:xfrm>
-            <a:off x="1153757" y="473336"/>
-            <a:ext cx="1355464" cy="314661"/>
-          </a:xfrm>
-          <a:prstGeom prst="roundRect">
-            <a:avLst/>
-          </a:prstGeom>
-        </p:spPr>
-        <p:style>
-          <a:lnRef idx="2">
-            <a:schemeClr val="accent1">
-              <a:shade val="50000"/>
-            </a:schemeClr>
-          </a:lnRef>
-          <a:fillRef idx="1">
-            <a:schemeClr val="accent1"/>
-          </a:fillRef>
-          <a:effectRef idx="0">
-            <a:schemeClr val="accent1"/>
-          </a:effectRef>
-          <a:fontRef idx="minor">
-            <a:schemeClr val="lt1"/>
-          </a:fontRef>
-        </p:style>
-        <p:txBody>
-          <a:bodyPr rtlCol="0" anchor="ctr"/>
-          <a:lstStyle/>
-          <a:p>
-            <a:pPr algn="ctr"/>
-            <a:r>
-              <a:rPr lang="en-US" altLang="ko-KR" sz="1350" dirty="0"/>
-              <a:t>1. </a:t>
-            </a:r>
-            <a:r>
-              <a:rPr lang="ko-KR" altLang="en-US" sz="1350" dirty="0"/>
-              <a:t>발전설비</a:t>
-            </a:r>
-          </a:p>
-        </p:txBody>
-      </p:sp>
-      <p:sp>
-        <p:nvSpPr>
-          <p:cNvPr id="5" name="사각형: 둥근 모서리 4">
-            <a:extLst>
-              <a:ext uri="{FF2B5EF4-FFF2-40B4-BE49-F238E27FC236}">
-                <a16:creationId xmlns:a16="http://schemas.microsoft.com/office/drawing/2014/main" id="{5D2C395D-4BCD-4C21-AD7C-2F91A0AD46DB}"/>
-              </a:ext>
-            </a:extLst>
-          </p:cNvPr>
-          <p:cNvSpPr/>
-          <p:nvPr/>
-        </p:nvSpPr>
-        <p:spPr>
-          <a:xfrm>
-            <a:off x="2678653" y="473336"/>
-            <a:ext cx="1355464" cy="314661"/>
-          </a:xfrm>
-          <a:prstGeom prst="roundRect">
-            <a:avLst/>
-          </a:prstGeom>
-        </p:spPr>
-        <p:style>
-          <a:lnRef idx="2">
-            <a:schemeClr val="accent1">
-              <a:shade val="50000"/>
-            </a:schemeClr>
-          </a:lnRef>
-          <a:fillRef idx="1">
-            <a:schemeClr val="accent1"/>
-          </a:fillRef>
-          <a:effectRef idx="0">
-            <a:schemeClr val="accent1"/>
-          </a:effectRef>
-          <a:fontRef idx="minor">
-            <a:schemeClr val="lt1"/>
-          </a:fontRef>
-        </p:style>
-        <p:txBody>
-          <a:bodyPr rtlCol="0" anchor="ctr"/>
-          <a:lstStyle/>
-          <a:p>
-            <a:pPr algn="ctr"/>
-            <a:r>
-              <a:rPr lang="en-US" altLang="ko-KR" sz="1350" dirty="0"/>
-              <a:t>2.</a:t>
-            </a:r>
-            <a:r>
-              <a:rPr lang="ko-KR" altLang="en-US" sz="1350" dirty="0"/>
-              <a:t>발전량</a:t>
-            </a:r>
-          </a:p>
-        </p:txBody>
-      </p:sp>
-      <p:sp>
-        <p:nvSpPr>
-          <p:cNvPr id="6" name="사각형: 둥근 모서리 5">
-            <a:extLst>
-              <a:ext uri="{FF2B5EF4-FFF2-40B4-BE49-F238E27FC236}">
-                <a16:creationId xmlns:a16="http://schemas.microsoft.com/office/drawing/2014/main" id="{6C0B6196-2A73-45B7-8FB8-DDF21B496B4A}"/>
-              </a:ext>
-            </a:extLst>
-          </p:cNvPr>
-          <p:cNvSpPr/>
-          <p:nvPr/>
-        </p:nvSpPr>
-        <p:spPr>
-          <a:xfrm>
-            <a:off x="4203549" y="473336"/>
-            <a:ext cx="1355464" cy="314661"/>
-          </a:xfrm>
-          <a:prstGeom prst="roundRect">
-            <a:avLst/>
-          </a:prstGeom>
-        </p:spPr>
-        <p:style>
-          <a:lnRef idx="2">
-            <a:schemeClr val="accent1">
-              <a:shade val="50000"/>
-            </a:schemeClr>
-          </a:lnRef>
-          <a:fillRef idx="1">
-            <a:schemeClr val="accent1"/>
-          </a:fillRef>
-          <a:effectRef idx="0">
-            <a:schemeClr val="accent1"/>
-          </a:effectRef>
-          <a:fontRef idx="minor">
-            <a:schemeClr val="lt1"/>
-          </a:fontRef>
-        </p:style>
-        <p:txBody>
-          <a:bodyPr rtlCol="0" anchor="ctr"/>
-          <a:lstStyle/>
-          <a:p>
-            <a:pPr algn="ctr"/>
-            <a:r>
-              <a:rPr lang="en-US" altLang="ko-KR" sz="1350" dirty="0"/>
-              <a:t>3. </a:t>
-            </a:r>
-            <a:r>
-              <a:rPr lang="ko-KR" altLang="en-US" sz="1350" dirty="0"/>
-              <a:t>전력수요</a:t>
-            </a:r>
-          </a:p>
-        </p:txBody>
-      </p:sp>
-      <p:sp>
-        <p:nvSpPr>
-          <p:cNvPr id="8" name="사각형: 둥근 모서리 7">
-            <a:extLst>
-              <a:ext uri="{FF2B5EF4-FFF2-40B4-BE49-F238E27FC236}">
-                <a16:creationId xmlns:a16="http://schemas.microsoft.com/office/drawing/2014/main" id="{94B33C20-02D8-4457-BA5C-98C8398A8B86}"/>
-              </a:ext>
-            </a:extLst>
-          </p:cNvPr>
-          <p:cNvSpPr/>
-          <p:nvPr/>
-        </p:nvSpPr>
-        <p:spPr>
-          <a:xfrm>
-            <a:off x="7253342" y="473336"/>
-            <a:ext cx="1355464" cy="314661"/>
-          </a:xfrm>
-          <a:prstGeom prst="roundRect">
-            <a:avLst/>
-          </a:prstGeom>
-        </p:spPr>
-        <p:style>
-          <a:lnRef idx="2">
-            <a:schemeClr val="accent1">
-              <a:shade val="50000"/>
-            </a:schemeClr>
-          </a:lnRef>
-          <a:fillRef idx="1">
-            <a:schemeClr val="accent1"/>
-          </a:fillRef>
-          <a:effectRef idx="0">
-            <a:schemeClr val="accent1"/>
-          </a:effectRef>
-          <a:fontRef idx="minor">
-            <a:schemeClr val="lt1"/>
-          </a:fontRef>
-        </p:style>
-        <p:txBody>
-          <a:bodyPr rtlCol="0" anchor="ctr"/>
-          <a:lstStyle/>
-          <a:p>
-            <a:pPr algn="ctr"/>
-            <a:r>
-              <a:rPr lang="en-US" altLang="ko-KR" sz="900" dirty="0"/>
-              <a:t>5. </a:t>
-            </a:r>
-            <a:r>
-              <a:rPr lang="ko-KR" altLang="en-US" sz="900" dirty="0"/>
-              <a:t>이산화탄소 배출량</a:t>
-            </a:r>
-          </a:p>
-        </p:txBody>
-      </p:sp>
-      <p:sp>
-        <p:nvSpPr>
-          <p:cNvPr id="9" name="직사각형 8">
-            <a:extLst>
-              <a:ext uri="{FF2B5EF4-FFF2-40B4-BE49-F238E27FC236}">
-                <a16:creationId xmlns:a16="http://schemas.microsoft.com/office/drawing/2014/main" id="{87BCDE08-9FA1-4D06-B558-7DEAB345DB23}"/>
-              </a:ext>
-            </a:extLst>
-          </p:cNvPr>
-          <p:cNvSpPr/>
-          <p:nvPr/>
-        </p:nvSpPr>
-        <p:spPr>
-          <a:xfrm>
-            <a:off x="524435" y="1067024"/>
-            <a:ext cx="8407101" cy="4542417"/>
-          </a:xfrm>
-          <a:prstGeom prst="rect">
-            <a:avLst/>
-          </a:prstGeom>
-          <a:noFill/>
-        </p:spPr>
-        <p:style>
-          <a:lnRef idx="2">
-            <a:schemeClr val="accent1">
-              <a:shade val="50000"/>
-            </a:schemeClr>
-          </a:lnRef>
-          <a:fillRef idx="1">
-            <a:schemeClr val="accent1"/>
-          </a:fillRef>
-          <a:effectRef idx="0">
-            <a:schemeClr val="accent1"/>
-          </a:effectRef>
-          <a:fontRef idx="minor">
-            <a:schemeClr val="lt1"/>
-          </a:fontRef>
-        </p:style>
-        <p:txBody>
-          <a:bodyPr rtlCol="0" anchor="ctr"/>
-          <a:lstStyle/>
-          <a:p>
-            <a:pPr algn="ctr"/>
-            <a:endParaRPr lang="ko-KR" altLang="en-US" sz="1350"/>
-          </a:p>
-        </p:txBody>
-      </p:sp>
-      <p:cxnSp>
-        <p:nvCxnSpPr>
-          <p:cNvPr id="11" name="직선 연결선 10">
-            <a:extLst>
-              <a:ext uri="{FF2B5EF4-FFF2-40B4-BE49-F238E27FC236}">
-                <a16:creationId xmlns:a16="http://schemas.microsoft.com/office/drawing/2014/main" id="{F96DC647-5080-46A4-9AEB-BAF2358B173F}"/>
-              </a:ext>
-            </a:extLst>
-          </p:cNvPr>
-          <p:cNvCxnSpPr/>
-          <p:nvPr/>
-        </p:nvCxnSpPr>
-        <p:spPr>
-          <a:xfrm>
-            <a:off x="524435" y="2309532"/>
-            <a:ext cx="8407101" cy="0"/>
-          </a:xfrm>
-          <a:prstGeom prst="line">
-            <a:avLst/>
-          </a:prstGeom>
-        </p:spPr>
-        <p:style>
-          <a:lnRef idx="1">
-            <a:schemeClr val="accent1"/>
-          </a:lnRef>
-          <a:fillRef idx="0">
-            <a:schemeClr val="accent1"/>
-          </a:fillRef>
-          <a:effectRef idx="0">
-            <a:schemeClr val="accent1"/>
-          </a:effectRef>
-          <a:fontRef idx="minor">
-            <a:schemeClr val="tx1"/>
-          </a:fontRef>
-        </p:style>
-      </p:cxnSp>
-      <p:sp>
-        <p:nvSpPr>
-          <p:cNvPr id="30" name="TextBox 29">
-            <a:extLst>
-              <a:ext uri="{FF2B5EF4-FFF2-40B4-BE49-F238E27FC236}">
-                <a16:creationId xmlns:a16="http://schemas.microsoft.com/office/drawing/2014/main" id="{AFFC6091-22F6-476F-8B86-6363FD8689E3}"/>
-              </a:ext>
-            </a:extLst>
-          </p:cNvPr>
-          <p:cNvSpPr txBox="1"/>
-          <p:nvPr/>
-        </p:nvSpPr>
-        <p:spPr>
-          <a:xfrm>
-            <a:off x="2100109" y="1944273"/>
-            <a:ext cx="1112992" cy="253916"/>
-          </a:xfrm>
-          <a:prstGeom prst="rect">
-            <a:avLst/>
-          </a:prstGeom>
-          <a:noFill/>
-          <a:ln>
-            <a:solidFill>
-              <a:schemeClr val="tx1"/>
-            </a:solidFill>
-          </a:ln>
-        </p:spPr>
-        <p:txBody>
-          <a:bodyPr wrap="square" rtlCol="0">
-            <a:spAutoFit/>
-          </a:bodyPr>
-          <a:lstStyle/>
-          <a:p>
-            <a:pPr algn="ctr"/>
-            <a:r>
-              <a:rPr lang="ko-KR" altLang="en-US" sz="1050" dirty="0"/>
-              <a:t>탄소배출량 </a:t>
-            </a:r>
-            <a:r>
-              <a:rPr lang="en-US" altLang="ko-KR" sz="1050" dirty="0"/>
-              <a:t>GIS</a:t>
-            </a:r>
-            <a:endParaRPr lang="ko-KR" altLang="en-US" sz="1050" dirty="0"/>
-          </a:p>
-        </p:txBody>
-      </p:sp>
-      <p:sp>
-        <p:nvSpPr>
-          <p:cNvPr id="26" name="TextBox 25">
-            <a:extLst>
-              <a:ext uri="{FF2B5EF4-FFF2-40B4-BE49-F238E27FC236}">
-                <a16:creationId xmlns:a16="http://schemas.microsoft.com/office/drawing/2014/main" id="{AD0F9C53-CCE6-44A8-A73A-D566A53C130A}"/>
-              </a:ext>
-            </a:extLst>
-          </p:cNvPr>
-          <p:cNvSpPr txBox="1"/>
-          <p:nvPr/>
-        </p:nvSpPr>
-        <p:spPr>
-          <a:xfrm>
-            <a:off x="2886332" y="1182563"/>
-            <a:ext cx="3683303" cy="553998"/>
-          </a:xfrm>
-          <a:prstGeom prst="rect">
-            <a:avLst/>
-          </a:prstGeom>
-          <a:noFill/>
-        </p:spPr>
-        <p:txBody>
-          <a:bodyPr wrap="square" rtlCol="0">
-            <a:spAutoFit/>
-          </a:bodyPr>
-          <a:lstStyle/>
-          <a:p>
-            <a:pPr algn="ctr"/>
-            <a:r>
-              <a:rPr lang="en-US" altLang="ko-KR" dirty="0"/>
-              <a:t>5. </a:t>
-            </a:r>
-            <a:r>
-              <a:rPr lang="ko-KR" altLang="en-US" dirty="0"/>
-              <a:t>이산화탄소 배출량</a:t>
-            </a:r>
-            <a:endParaRPr lang="en-US" altLang="ko-KR" dirty="0"/>
-          </a:p>
-          <a:p>
-            <a:pPr algn="ctr"/>
-            <a:r>
-              <a:rPr lang="en-US" altLang="ko-KR" sz="1200" dirty="0"/>
-              <a:t>2023</a:t>
-            </a:r>
-            <a:r>
-              <a:rPr lang="ko-KR" altLang="en-US" sz="1200" dirty="0"/>
-              <a:t>년 전세계 총 탄소배출 규모</a:t>
-            </a:r>
-            <a:r>
-              <a:rPr lang="en-US" altLang="ko-KR" sz="1200" dirty="0"/>
-              <a:t>(Mt)</a:t>
-            </a:r>
-            <a:r>
-              <a:rPr lang="ko-KR" altLang="en-US" sz="1200" dirty="0"/>
-              <a:t> 및 비율</a:t>
-            </a:r>
-            <a:r>
-              <a:rPr lang="en-US" altLang="ko-KR" sz="1200" dirty="0"/>
-              <a:t>(%)</a:t>
-            </a:r>
-            <a:endParaRPr lang="ko-KR" altLang="en-US" sz="1200" dirty="0"/>
-          </a:p>
-        </p:txBody>
-      </p:sp>
-      <p:sp>
-        <p:nvSpPr>
-          <p:cNvPr id="27" name="TextBox 26">
-            <a:extLst>
-              <a:ext uri="{FF2B5EF4-FFF2-40B4-BE49-F238E27FC236}">
-                <a16:creationId xmlns:a16="http://schemas.microsoft.com/office/drawing/2014/main" id="{0527FAD5-EEE1-40CF-8F25-AB3841AB3831}"/>
-              </a:ext>
-            </a:extLst>
-          </p:cNvPr>
-          <p:cNvSpPr txBox="1"/>
-          <p:nvPr/>
-        </p:nvSpPr>
-        <p:spPr>
-          <a:xfrm>
-            <a:off x="680516" y="1938931"/>
-            <a:ext cx="1263512" cy="276999"/>
-          </a:xfrm>
-          <a:prstGeom prst="rect">
-            <a:avLst/>
-          </a:prstGeom>
-          <a:noFill/>
-          <a:ln>
-            <a:solidFill>
-              <a:schemeClr val="tx1"/>
-            </a:solidFill>
-          </a:ln>
-        </p:spPr>
-        <p:txBody>
-          <a:bodyPr wrap="square" rtlCol="0">
-            <a:spAutoFit/>
-          </a:bodyPr>
-          <a:lstStyle/>
-          <a:p>
-            <a:pPr algn="ctr"/>
-            <a:r>
-              <a:rPr lang="ko-KR" altLang="en-US" sz="1200" dirty="0"/>
-              <a:t>탄소배출량</a:t>
-            </a:r>
-          </a:p>
-        </p:txBody>
-      </p:sp>
-      <p:sp>
-        <p:nvSpPr>
-          <p:cNvPr id="19" name="사각형: 둥근 모서리 18">
-            <a:extLst>
-              <a:ext uri="{FF2B5EF4-FFF2-40B4-BE49-F238E27FC236}">
-                <a16:creationId xmlns:a16="http://schemas.microsoft.com/office/drawing/2014/main" id="{56F193DD-5E49-4309-8461-E4677DAB0C4C}"/>
-              </a:ext>
-            </a:extLst>
-          </p:cNvPr>
-          <p:cNvSpPr/>
-          <p:nvPr/>
-        </p:nvSpPr>
-        <p:spPr>
-          <a:xfrm>
-            <a:off x="680516" y="2583854"/>
-            <a:ext cx="473241" cy="152489"/>
-          </a:xfrm>
-          <a:prstGeom prst="roundRect">
-            <a:avLst/>
-          </a:prstGeom>
-          <a:noFill/>
-        </p:spPr>
-        <p:style>
-          <a:lnRef idx="2">
-            <a:schemeClr val="accent1">
-              <a:shade val="50000"/>
-            </a:schemeClr>
-          </a:lnRef>
-          <a:fillRef idx="1">
-            <a:schemeClr val="accent1"/>
-          </a:fillRef>
-          <a:effectRef idx="0">
-            <a:schemeClr val="accent1"/>
-          </a:effectRef>
-          <a:fontRef idx="minor">
-            <a:schemeClr val="lt1"/>
-          </a:fontRef>
-        </p:style>
-        <p:txBody>
-          <a:bodyPr rtlCol="0" anchor="ctr"/>
-          <a:lstStyle/>
-          <a:p>
-            <a:pPr algn="ctr"/>
-            <a:r>
-              <a:rPr lang="en-US" altLang="ko-KR" sz="1000" dirty="0">
-                <a:solidFill>
-                  <a:schemeClr val="tx1"/>
-                </a:solidFill>
-              </a:rPr>
-              <a:t>2017</a:t>
-            </a:r>
-            <a:endParaRPr lang="ko-KR" altLang="en-US" sz="1000" dirty="0">
-              <a:solidFill>
-                <a:schemeClr val="tx1"/>
-              </a:solidFill>
-            </a:endParaRPr>
-          </a:p>
-        </p:txBody>
-      </p:sp>
-      <p:sp>
-        <p:nvSpPr>
-          <p:cNvPr id="20" name="사각형: 둥근 모서리 19">
-            <a:extLst>
-              <a:ext uri="{FF2B5EF4-FFF2-40B4-BE49-F238E27FC236}">
-                <a16:creationId xmlns:a16="http://schemas.microsoft.com/office/drawing/2014/main" id="{7A33B90A-B476-4628-8225-3E0102BA80F7}"/>
-              </a:ext>
-            </a:extLst>
-          </p:cNvPr>
-          <p:cNvSpPr/>
-          <p:nvPr/>
-        </p:nvSpPr>
-        <p:spPr>
-          <a:xfrm>
-            <a:off x="1217926" y="2583854"/>
-            <a:ext cx="473241" cy="152489"/>
-          </a:xfrm>
-          <a:prstGeom prst="roundRect">
-            <a:avLst/>
-          </a:prstGeom>
-          <a:noFill/>
-        </p:spPr>
-        <p:style>
-          <a:lnRef idx="2">
-            <a:schemeClr val="accent1">
-              <a:shade val="50000"/>
-            </a:schemeClr>
-          </a:lnRef>
-          <a:fillRef idx="1">
-            <a:schemeClr val="accent1"/>
-          </a:fillRef>
-          <a:effectRef idx="0">
-            <a:schemeClr val="accent1"/>
-          </a:effectRef>
-          <a:fontRef idx="minor">
-            <a:schemeClr val="lt1"/>
-          </a:fontRef>
-        </p:style>
-        <p:txBody>
-          <a:bodyPr rtlCol="0" anchor="ctr"/>
-          <a:lstStyle/>
-          <a:p>
-            <a:pPr algn="ctr"/>
-            <a:r>
-              <a:rPr lang="en-US" altLang="ko-KR" sz="1000" dirty="0">
-                <a:solidFill>
-                  <a:schemeClr val="tx1"/>
-                </a:solidFill>
-              </a:rPr>
-              <a:t>2018</a:t>
-            </a:r>
-            <a:endParaRPr lang="ko-KR" altLang="en-US" sz="1000" dirty="0">
-              <a:solidFill>
-                <a:schemeClr val="tx1"/>
-              </a:solidFill>
-            </a:endParaRPr>
-          </a:p>
-        </p:txBody>
-      </p:sp>
-      <p:sp>
-        <p:nvSpPr>
-          <p:cNvPr id="21" name="사각형: 둥근 모서리 20">
-            <a:extLst>
-              <a:ext uri="{FF2B5EF4-FFF2-40B4-BE49-F238E27FC236}">
-                <a16:creationId xmlns:a16="http://schemas.microsoft.com/office/drawing/2014/main" id="{CD5F2512-5A50-4358-9A5D-CCB6998AC996}"/>
-              </a:ext>
-            </a:extLst>
-          </p:cNvPr>
-          <p:cNvSpPr/>
-          <p:nvPr/>
-        </p:nvSpPr>
-        <p:spPr>
-          <a:xfrm>
-            <a:off x="1755336" y="2583854"/>
-            <a:ext cx="473241" cy="152489"/>
-          </a:xfrm>
-          <a:prstGeom prst="roundRect">
-            <a:avLst/>
-          </a:prstGeom>
-          <a:noFill/>
-        </p:spPr>
-        <p:style>
-          <a:lnRef idx="2">
-            <a:schemeClr val="accent1">
-              <a:shade val="50000"/>
-            </a:schemeClr>
-          </a:lnRef>
-          <a:fillRef idx="1">
-            <a:schemeClr val="accent1"/>
-          </a:fillRef>
-          <a:effectRef idx="0">
-            <a:schemeClr val="accent1"/>
-          </a:effectRef>
-          <a:fontRef idx="minor">
-            <a:schemeClr val="lt1"/>
-          </a:fontRef>
-        </p:style>
-        <p:txBody>
-          <a:bodyPr rtlCol="0" anchor="ctr"/>
-          <a:lstStyle/>
-          <a:p>
-            <a:pPr algn="ctr"/>
-            <a:r>
-              <a:rPr lang="en-US" altLang="ko-KR" sz="1000" dirty="0">
-                <a:solidFill>
-                  <a:schemeClr val="tx1"/>
-                </a:solidFill>
-              </a:rPr>
-              <a:t>2019</a:t>
-            </a:r>
-            <a:endParaRPr lang="ko-KR" altLang="en-US" sz="1000" dirty="0">
-              <a:solidFill>
-                <a:schemeClr val="tx1"/>
-              </a:solidFill>
-            </a:endParaRPr>
-          </a:p>
-        </p:txBody>
-      </p:sp>
-      <p:sp>
-        <p:nvSpPr>
-          <p:cNvPr id="22" name="사각형: 둥근 모서리 21">
-            <a:extLst>
-              <a:ext uri="{FF2B5EF4-FFF2-40B4-BE49-F238E27FC236}">
-                <a16:creationId xmlns:a16="http://schemas.microsoft.com/office/drawing/2014/main" id="{D55B95F7-B271-4498-B717-A6EC704F2E04}"/>
-              </a:ext>
-            </a:extLst>
-          </p:cNvPr>
-          <p:cNvSpPr/>
-          <p:nvPr/>
-        </p:nvSpPr>
-        <p:spPr>
-          <a:xfrm>
-            <a:off x="2292746" y="2583854"/>
-            <a:ext cx="473241" cy="152489"/>
-          </a:xfrm>
-          <a:prstGeom prst="roundRect">
-            <a:avLst/>
-          </a:prstGeom>
-          <a:noFill/>
-        </p:spPr>
-        <p:style>
-          <a:lnRef idx="2">
-            <a:schemeClr val="accent1">
-              <a:shade val="50000"/>
-            </a:schemeClr>
-          </a:lnRef>
-          <a:fillRef idx="1">
-            <a:schemeClr val="accent1"/>
-          </a:fillRef>
-          <a:effectRef idx="0">
-            <a:schemeClr val="accent1"/>
-          </a:effectRef>
-          <a:fontRef idx="minor">
-            <a:schemeClr val="lt1"/>
-          </a:fontRef>
-        </p:style>
-        <p:txBody>
-          <a:bodyPr rtlCol="0" anchor="ctr"/>
-          <a:lstStyle/>
-          <a:p>
-            <a:pPr algn="ctr"/>
-            <a:r>
-              <a:rPr lang="en-US" altLang="ko-KR" sz="1000" dirty="0">
-                <a:solidFill>
-                  <a:schemeClr val="tx1"/>
-                </a:solidFill>
-              </a:rPr>
-              <a:t>2020</a:t>
-            </a:r>
-            <a:endParaRPr lang="ko-KR" altLang="en-US" sz="1000" dirty="0">
-              <a:solidFill>
-                <a:schemeClr val="tx1"/>
-              </a:solidFill>
-            </a:endParaRPr>
-          </a:p>
-        </p:txBody>
-      </p:sp>
-      <p:sp>
-        <p:nvSpPr>
-          <p:cNvPr id="29" name="사각형: 둥근 모서리 28">
-            <a:extLst>
-              <a:ext uri="{FF2B5EF4-FFF2-40B4-BE49-F238E27FC236}">
-                <a16:creationId xmlns:a16="http://schemas.microsoft.com/office/drawing/2014/main" id="{7637B932-0B5A-423E-A618-418A59609527}"/>
-              </a:ext>
-            </a:extLst>
-          </p:cNvPr>
-          <p:cNvSpPr/>
-          <p:nvPr/>
-        </p:nvSpPr>
-        <p:spPr>
-          <a:xfrm>
-            <a:off x="2830156" y="2583854"/>
-            <a:ext cx="473241" cy="152489"/>
-          </a:xfrm>
-          <a:prstGeom prst="roundRect">
-            <a:avLst/>
-          </a:prstGeom>
-          <a:noFill/>
-        </p:spPr>
-        <p:style>
-          <a:lnRef idx="2">
-            <a:schemeClr val="accent1">
-              <a:shade val="50000"/>
-            </a:schemeClr>
-          </a:lnRef>
-          <a:fillRef idx="1">
-            <a:schemeClr val="accent1"/>
-          </a:fillRef>
-          <a:effectRef idx="0">
-            <a:schemeClr val="accent1"/>
-          </a:effectRef>
-          <a:fontRef idx="minor">
-            <a:schemeClr val="lt1"/>
-          </a:fontRef>
-        </p:style>
-        <p:txBody>
-          <a:bodyPr rtlCol="0" anchor="ctr"/>
-          <a:lstStyle/>
-          <a:p>
-            <a:pPr algn="ctr"/>
-            <a:r>
-              <a:rPr lang="en-US" altLang="ko-KR" sz="1000" dirty="0">
-                <a:solidFill>
-                  <a:schemeClr val="tx1"/>
-                </a:solidFill>
-              </a:rPr>
-              <a:t>2021</a:t>
-            </a:r>
-            <a:endParaRPr lang="ko-KR" altLang="en-US" sz="1000" dirty="0">
-              <a:solidFill>
-                <a:schemeClr val="tx1"/>
-              </a:solidFill>
-            </a:endParaRPr>
-          </a:p>
-        </p:txBody>
-      </p:sp>
-      <p:sp>
-        <p:nvSpPr>
-          <p:cNvPr id="31" name="사각형: 둥근 모서리 30">
-            <a:extLst>
-              <a:ext uri="{FF2B5EF4-FFF2-40B4-BE49-F238E27FC236}">
-                <a16:creationId xmlns:a16="http://schemas.microsoft.com/office/drawing/2014/main" id="{EC1735A1-FB56-4FCD-B448-75FFEBA3D77D}"/>
-              </a:ext>
-            </a:extLst>
-          </p:cNvPr>
-          <p:cNvSpPr/>
-          <p:nvPr/>
-        </p:nvSpPr>
-        <p:spPr>
-          <a:xfrm>
-            <a:off x="3367566" y="2583854"/>
-            <a:ext cx="473241" cy="152489"/>
-          </a:xfrm>
-          <a:prstGeom prst="roundRect">
-            <a:avLst/>
-          </a:prstGeom>
-          <a:noFill/>
-        </p:spPr>
-        <p:style>
-          <a:lnRef idx="2">
-            <a:schemeClr val="accent1">
-              <a:shade val="50000"/>
-            </a:schemeClr>
-          </a:lnRef>
-          <a:fillRef idx="1">
-            <a:schemeClr val="accent1"/>
-          </a:fillRef>
-          <a:effectRef idx="0">
-            <a:schemeClr val="accent1"/>
-          </a:effectRef>
-          <a:fontRef idx="minor">
-            <a:schemeClr val="lt1"/>
-          </a:fontRef>
-        </p:style>
-        <p:txBody>
-          <a:bodyPr rtlCol="0" anchor="ctr"/>
-          <a:lstStyle/>
-          <a:p>
-            <a:pPr algn="ctr"/>
-            <a:r>
-              <a:rPr lang="en-US" altLang="ko-KR" sz="1000" dirty="0">
-                <a:solidFill>
-                  <a:schemeClr val="tx1"/>
-                </a:solidFill>
-              </a:rPr>
-              <a:t>2022</a:t>
-            </a:r>
-            <a:endParaRPr lang="ko-KR" altLang="en-US" sz="1000" dirty="0">
-              <a:solidFill>
-                <a:schemeClr val="tx1"/>
-              </a:solidFill>
-            </a:endParaRPr>
-          </a:p>
-        </p:txBody>
-      </p:sp>
-      <p:sp>
-        <p:nvSpPr>
-          <p:cNvPr id="32" name="사각형: 둥근 모서리 31">
-            <a:extLst>
-              <a:ext uri="{FF2B5EF4-FFF2-40B4-BE49-F238E27FC236}">
-                <a16:creationId xmlns:a16="http://schemas.microsoft.com/office/drawing/2014/main" id="{F2F56303-A59D-489B-9F79-47417E983A8C}"/>
-              </a:ext>
-            </a:extLst>
-          </p:cNvPr>
-          <p:cNvSpPr/>
-          <p:nvPr/>
-        </p:nvSpPr>
-        <p:spPr>
-          <a:xfrm>
-            <a:off x="3904976" y="2583854"/>
-            <a:ext cx="473241" cy="152489"/>
-          </a:xfrm>
-          <a:prstGeom prst="roundRect">
-            <a:avLst/>
-          </a:prstGeom>
-          <a:noFill/>
-        </p:spPr>
-        <p:style>
-          <a:lnRef idx="2">
-            <a:schemeClr val="accent1">
-              <a:shade val="50000"/>
-            </a:schemeClr>
-          </a:lnRef>
-          <a:fillRef idx="1">
-            <a:schemeClr val="accent1"/>
-          </a:fillRef>
-          <a:effectRef idx="0">
-            <a:schemeClr val="accent1"/>
-          </a:effectRef>
-          <a:fontRef idx="minor">
-            <a:schemeClr val="lt1"/>
-          </a:fontRef>
-        </p:style>
-        <p:txBody>
-          <a:bodyPr rtlCol="0" anchor="ctr"/>
-          <a:lstStyle/>
-          <a:p>
-            <a:pPr algn="ctr"/>
-            <a:r>
-              <a:rPr lang="en-US" altLang="ko-KR" sz="1000" dirty="0">
-                <a:solidFill>
-                  <a:schemeClr val="tx1"/>
-                </a:solidFill>
-              </a:rPr>
-              <a:t>2023</a:t>
-            </a:r>
-            <a:endParaRPr lang="ko-KR" altLang="en-US" sz="1000" dirty="0">
-              <a:solidFill>
-                <a:schemeClr val="tx1"/>
-              </a:solidFill>
-            </a:endParaRPr>
-          </a:p>
-        </p:txBody>
-      </p:sp>
-      <p:sp>
-        <p:nvSpPr>
-          <p:cNvPr id="33" name="TextBox 32">
-            <a:extLst>
-              <a:ext uri="{FF2B5EF4-FFF2-40B4-BE49-F238E27FC236}">
-                <a16:creationId xmlns:a16="http://schemas.microsoft.com/office/drawing/2014/main" id="{EF65E1B6-B51A-4FEA-82B7-D841D6A39DB8}"/>
-              </a:ext>
-            </a:extLst>
-          </p:cNvPr>
-          <p:cNvSpPr txBox="1"/>
-          <p:nvPr/>
-        </p:nvSpPr>
-        <p:spPr>
-          <a:xfrm>
-            <a:off x="624368" y="2326648"/>
-            <a:ext cx="895291" cy="253916"/>
-          </a:xfrm>
-          <a:prstGeom prst="rect">
-            <a:avLst/>
-          </a:prstGeom>
-          <a:noFill/>
-        </p:spPr>
-        <p:txBody>
-          <a:bodyPr wrap="square" rtlCol="0">
-            <a:spAutoFit/>
-          </a:bodyPr>
-          <a:lstStyle/>
-          <a:p>
-            <a:r>
-              <a:rPr lang="ko-KR" altLang="en-US" sz="1050" dirty="0"/>
-              <a:t>기준 연도</a:t>
-            </a:r>
-          </a:p>
-        </p:txBody>
-      </p:sp>
-      <p:sp>
-        <p:nvSpPr>
-          <p:cNvPr id="34" name="TextBox 33">
-            <a:extLst>
-              <a:ext uri="{FF2B5EF4-FFF2-40B4-BE49-F238E27FC236}">
-                <a16:creationId xmlns:a16="http://schemas.microsoft.com/office/drawing/2014/main" id="{AABFDD26-C717-4B2E-B0E1-540A54C1B296}"/>
-              </a:ext>
-            </a:extLst>
-          </p:cNvPr>
-          <p:cNvSpPr txBox="1"/>
-          <p:nvPr/>
-        </p:nvSpPr>
-        <p:spPr>
-          <a:xfrm>
-            <a:off x="3348480" y="1944273"/>
-            <a:ext cx="1112992" cy="253916"/>
-          </a:xfrm>
-          <a:prstGeom prst="rect">
-            <a:avLst/>
-          </a:prstGeom>
-          <a:noFill/>
-          <a:ln>
-            <a:solidFill>
-              <a:schemeClr val="tx1"/>
-            </a:solidFill>
-          </a:ln>
-        </p:spPr>
-        <p:txBody>
-          <a:bodyPr wrap="square" rtlCol="0">
-            <a:spAutoFit/>
-          </a:bodyPr>
-          <a:lstStyle/>
-          <a:p>
-            <a:pPr algn="ctr"/>
-            <a:r>
-              <a:rPr lang="ko-KR" altLang="en-US" sz="1050" dirty="0"/>
-              <a:t>배출 </a:t>
-            </a:r>
-            <a:r>
-              <a:rPr lang="ko-KR" altLang="en-US" sz="1050" dirty="0" err="1"/>
-              <a:t>증감량</a:t>
-            </a:r>
-            <a:endParaRPr lang="ko-KR" altLang="en-US" sz="1050" dirty="0"/>
-          </a:p>
-        </p:txBody>
-      </p:sp>
-      <p:sp>
-        <p:nvSpPr>
-          <p:cNvPr id="36" name="TextBox 35">
-            <a:extLst>
-              <a:ext uri="{FF2B5EF4-FFF2-40B4-BE49-F238E27FC236}">
-                <a16:creationId xmlns:a16="http://schemas.microsoft.com/office/drawing/2014/main" id="{C3923473-5773-4BE8-88E2-91203489BF82}"/>
-              </a:ext>
-            </a:extLst>
-          </p:cNvPr>
-          <p:cNvSpPr txBox="1"/>
-          <p:nvPr/>
-        </p:nvSpPr>
-        <p:spPr>
-          <a:xfrm>
-            <a:off x="4596851" y="1944273"/>
-            <a:ext cx="1263512" cy="253916"/>
-          </a:xfrm>
-          <a:prstGeom prst="rect">
-            <a:avLst/>
-          </a:prstGeom>
-          <a:solidFill>
-            <a:schemeClr val="bg1">
-              <a:lumMod val="85000"/>
-            </a:schemeClr>
-          </a:solidFill>
-          <a:ln>
-            <a:solidFill>
-              <a:schemeClr val="tx1"/>
-            </a:solidFill>
-          </a:ln>
-        </p:spPr>
-        <p:txBody>
-          <a:bodyPr wrap="square" rtlCol="0">
-            <a:spAutoFit/>
-          </a:bodyPr>
-          <a:lstStyle/>
-          <a:p>
-            <a:pPr algn="ctr"/>
-            <a:r>
-              <a:rPr lang="ko-KR" altLang="en-US" sz="1050"/>
-              <a:t>배출규모 점유율</a:t>
-            </a:r>
-            <a:endParaRPr lang="ko-KR" altLang="en-US" sz="1050" dirty="0"/>
-          </a:p>
-        </p:txBody>
-      </p:sp>
-      <p:pic>
-        <p:nvPicPr>
-          <p:cNvPr id="3" name="그림 2">
-            <a:extLst>
-              <a:ext uri="{FF2B5EF4-FFF2-40B4-BE49-F238E27FC236}">
-                <a16:creationId xmlns:a16="http://schemas.microsoft.com/office/drawing/2014/main" id="{212122FB-B0DC-4E8F-AF8A-B5B563A9FA1E}"/>
-              </a:ext>
-            </a:extLst>
-          </p:cNvPr>
-          <p:cNvPicPr>
-            <a:picLocks noChangeAspect="1"/>
-          </p:cNvPicPr>
-          <p:nvPr/>
-        </p:nvPicPr>
-        <p:blipFill>
-          <a:blip r:embed="rId2">
-            <a:extLst>
-              <a:ext uri="{28A0092B-C50C-407E-A947-70E740481C1C}">
-                <a14:useLocalDpi xmlns:a14="http://schemas.microsoft.com/office/drawing/2010/main" val="0"/>
-              </a:ext>
-            </a:extLst>
-          </a:blip>
-          <a:stretch>
-            <a:fillRect/>
-          </a:stretch>
-        </p:blipFill>
-        <p:spPr>
-          <a:xfrm>
-            <a:off x="2609575" y="2781841"/>
-            <a:ext cx="3703794" cy="2777846"/>
-          </a:xfrm>
-          <a:prstGeom prst="rect">
-            <a:avLst/>
-          </a:prstGeom>
-        </p:spPr>
-      </p:pic>
-      <p:sp>
-        <p:nvSpPr>
-          <p:cNvPr id="23" name="사각형: 둥근 모서리 22">
-            <a:extLst>
-              <a:ext uri="{FF2B5EF4-FFF2-40B4-BE49-F238E27FC236}">
-                <a16:creationId xmlns:a16="http://schemas.microsoft.com/office/drawing/2014/main" id="{961E67BE-5F5C-41C4-AE11-052887FDB763}"/>
-              </a:ext>
-            </a:extLst>
-          </p:cNvPr>
-          <p:cNvSpPr/>
-          <p:nvPr/>
-        </p:nvSpPr>
-        <p:spPr>
-          <a:xfrm>
-            <a:off x="5728446" y="479376"/>
-            <a:ext cx="1355464" cy="314661"/>
-          </a:xfrm>
-          <a:prstGeom prst="roundRect">
-            <a:avLst/>
-          </a:prstGeom>
-        </p:spPr>
-        <p:style>
-          <a:lnRef idx="2">
-            <a:schemeClr val="accent1">
-              <a:shade val="50000"/>
-            </a:schemeClr>
-          </a:lnRef>
-          <a:fillRef idx="1">
-            <a:schemeClr val="accent1"/>
-          </a:fillRef>
-          <a:effectRef idx="0">
-            <a:schemeClr val="accent1"/>
-          </a:effectRef>
-          <a:fontRef idx="minor">
-            <a:schemeClr val="lt1"/>
-          </a:fontRef>
-        </p:style>
-        <p:txBody>
-          <a:bodyPr rtlCol="0" anchor="ctr"/>
-          <a:lstStyle/>
-          <a:p>
-            <a:pPr algn="ctr"/>
-            <a:r>
-              <a:rPr lang="en-US" altLang="ko-KR" sz="1050" dirty="0"/>
-              <a:t>4.</a:t>
-            </a:r>
-            <a:r>
-              <a:rPr lang="ko-KR" altLang="en-US" sz="1050" dirty="0"/>
-              <a:t> 연평균 재생에너지 이용률</a:t>
-            </a:r>
           </a:p>
         </p:txBody>
       </p:sp>
@@ -9411,42 +8686,6 @@
           </a:p>
         </p:txBody>
       </p:sp>
-      <p:pic>
-        <p:nvPicPr>
-          <p:cNvPr id="12" name="그림 11">
-            <a:extLst>
-              <a:ext uri="{FF2B5EF4-FFF2-40B4-BE49-F238E27FC236}">
-                <a16:creationId xmlns:a16="http://schemas.microsoft.com/office/drawing/2014/main" id="{8D0BB0EC-1205-40EC-B613-9295B0CE7381}"/>
-              </a:ext>
-            </a:extLst>
-          </p:cNvPr>
-          <p:cNvPicPr>
-            <a:picLocks noChangeAspect="1"/>
-          </p:cNvPicPr>
-          <p:nvPr/>
-        </p:nvPicPr>
-        <p:blipFill>
-          <a:blip r:embed="rId2">
-            <a:extLst>
-              <a:ext uri="{28A0092B-C50C-407E-A947-70E740481C1C}">
-                <a14:useLocalDpi xmlns:a14="http://schemas.microsoft.com/office/drawing/2010/main" val="0"/>
-              </a:ext>
-            </a:extLst>
-          </a:blip>
-          <a:stretch>
-            <a:fillRect/>
-          </a:stretch>
-        </p:blipFill>
-        <p:spPr>
-          <a:xfrm>
-            <a:off x="2423718" y="2567292"/>
-            <a:ext cx="4915125" cy="2904393"/>
-          </a:xfrm>
-          <a:prstGeom prst="rect">
-            <a:avLst/>
-          </a:prstGeom>
-        </p:spPr>
-      </p:pic>
       <p:sp>
         <p:nvSpPr>
           <p:cNvPr id="13" name="사각형: 둥근 모서리 12">
@@ -9500,6 +8739,41 @@
           </a:p>
         </p:txBody>
       </p:sp>
+      <p:pic>
+        <p:nvPicPr>
+          <p:cNvPr id="15" name="Picture 1">
+            <a:extLst>
+              <a:ext uri="{FF2B5EF4-FFF2-40B4-BE49-F238E27FC236}">
+                <a16:creationId xmlns:a16="http://schemas.microsoft.com/office/drawing/2014/main" id="{4FCBC091-C534-4FFD-99DF-3E3E10D0F5E9}"/>
+              </a:ext>
+            </a:extLst>
+          </p:cNvPr>
+          <p:cNvPicPr>
+            <a:picLocks noChangeAspect="1"/>
+          </p:cNvPicPr>
+          <p:nvPr/>
+        </p:nvPicPr>
+        <p:blipFill>
+          <a:blip r:embed="rId2"/>
+          <a:stretch>
+            <a:fillRect/>
+          </a:stretch>
+        </p:blipFill>
+        <p:spPr>
+          <a:xfrm>
+            <a:off x="2509221" y="2431145"/>
+            <a:ext cx="5198618" cy="3072765"/>
+          </a:xfrm>
+          <a:prstGeom prst="rect">
+            <a:avLst/>
+          </a:prstGeom>
+          <a:noFill/>
+          <a:ln>
+            <a:noFill/>
+          </a:ln>
+          <a:effectLst/>
+        </p:spPr>
+      </p:pic>
     </p:spTree>
     <p:extLst>
       <p:ext uri="{BB962C8B-B14F-4D97-AF65-F5344CB8AC3E}">
@@ -10825,42 +10099,6 @@
           </a:p>
         </p:txBody>
       </p:sp>
-      <p:pic>
-        <p:nvPicPr>
-          <p:cNvPr id="3" name="그림 2">
-            <a:extLst>
-              <a:ext uri="{FF2B5EF4-FFF2-40B4-BE49-F238E27FC236}">
-                <a16:creationId xmlns:a16="http://schemas.microsoft.com/office/drawing/2014/main" id="{91C42B39-BE28-4BDE-BF99-BE22FBF9D8B8}"/>
-              </a:ext>
-            </a:extLst>
-          </p:cNvPr>
-          <p:cNvPicPr>
-            <a:picLocks noChangeAspect="1"/>
-          </p:cNvPicPr>
-          <p:nvPr/>
-        </p:nvPicPr>
-        <p:blipFill>
-          <a:blip r:embed="rId2">
-            <a:extLst>
-              <a:ext uri="{28A0092B-C50C-407E-A947-70E740481C1C}">
-                <a14:useLocalDpi xmlns:a14="http://schemas.microsoft.com/office/drawing/2010/main" val="0"/>
-              </a:ext>
-            </a:extLst>
-          </a:blip>
-          <a:stretch>
-            <a:fillRect/>
-          </a:stretch>
-        </p:blipFill>
-        <p:spPr>
-          <a:xfrm>
-            <a:off x="2572645" y="2775440"/>
-            <a:ext cx="4310679" cy="2547220"/>
-          </a:xfrm>
-          <a:prstGeom prst="rect">
-            <a:avLst/>
-          </a:prstGeom>
-        </p:spPr>
-      </p:pic>
       <p:sp>
         <p:nvSpPr>
           <p:cNvPr id="23" name="사각형: 둥근 모서리 22">
@@ -10881,7 +10119,11 @@
           <a:prstGeom prst="roundRect">
             <a:avLst/>
           </a:prstGeom>
-          <a:noFill/>
+          <a:solidFill>
+            <a:schemeClr val="bg1">
+              <a:lumMod val="85000"/>
+            </a:schemeClr>
+          </a:solidFill>
         </p:spPr>
         <p:style>
           <a:lnRef idx="2">
@@ -11127,6 +10369,42 @@
           </a:p>
         </p:txBody>
       </p:sp>
+      <p:pic>
+        <p:nvPicPr>
+          <p:cNvPr id="7" name="그림 6">
+            <a:extLst>
+              <a:ext uri="{FF2B5EF4-FFF2-40B4-BE49-F238E27FC236}">
+                <a16:creationId xmlns:a16="http://schemas.microsoft.com/office/drawing/2014/main" id="{76397B69-809B-443A-9F7F-37DF19EE5C60}"/>
+              </a:ext>
+            </a:extLst>
+          </p:cNvPr>
+          <p:cNvPicPr>
+            <a:picLocks noChangeAspect="1"/>
+          </p:cNvPicPr>
+          <p:nvPr/>
+        </p:nvPicPr>
+        <p:blipFill>
+          <a:blip r:embed="rId2">
+            <a:extLst>
+              <a:ext uri="{28A0092B-C50C-407E-A947-70E740481C1C}">
+                <a14:useLocalDpi xmlns:a14="http://schemas.microsoft.com/office/drawing/2010/main" val="0"/>
+              </a:ext>
+            </a:extLst>
+          </a:blip>
+          <a:stretch>
+            <a:fillRect/>
+          </a:stretch>
+        </p:blipFill>
+        <p:spPr>
+          <a:xfrm>
+            <a:off x="2644971" y="2778333"/>
+            <a:ext cx="4720046" cy="2789118"/>
+          </a:xfrm>
+          <a:prstGeom prst="rect">
+            <a:avLst/>
+          </a:prstGeom>
+        </p:spPr>
+      </p:pic>
     </p:spTree>
     <p:extLst>
       <p:ext uri="{BB962C8B-B14F-4D97-AF65-F5344CB8AC3E}">
@@ -12053,10 +11331,10 @@
       </p:sp>
       <p:sp>
         <p:nvSpPr>
-          <p:cNvPr id="34" name="TextBox 33">
-            <a:extLst>
-              <a:ext uri="{FF2B5EF4-FFF2-40B4-BE49-F238E27FC236}">
-                <a16:creationId xmlns:a16="http://schemas.microsoft.com/office/drawing/2014/main" id="{AABFDD26-C717-4B2E-B0E1-540A54C1B296}"/>
+          <p:cNvPr id="36" name="TextBox 35">
+            <a:extLst>
+              <a:ext uri="{FF2B5EF4-FFF2-40B4-BE49-F238E27FC236}">
+                <a16:creationId xmlns:a16="http://schemas.microsoft.com/office/drawing/2014/main" id="{C3923473-5773-4BE8-88E2-91203489BF82}"/>
               </a:ext>
             </a:extLst>
           </p:cNvPr>
@@ -12065,53 +11343,7 @@
         </p:nvSpPr>
         <p:spPr>
           <a:xfrm>
-            <a:off x="3348480" y="1944273"/>
-            <a:ext cx="1112992" cy="253916"/>
-          </a:xfrm>
-          <a:prstGeom prst="rect">
-            <a:avLst/>
-          </a:prstGeom>
-          <a:noFill/>
-          <a:ln>
-            <a:solidFill>
-              <a:schemeClr val="tx1"/>
-            </a:solidFill>
-          </a:ln>
-        </p:spPr>
-        <p:txBody>
-          <a:bodyPr wrap="square" rtlCol="0">
-            <a:spAutoFit/>
-          </a:bodyPr>
-          <a:lstStyle/>
-          <a:p>
-            <a:pPr algn="ctr"/>
-            <a:r>
-              <a:rPr lang="ko-KR" altLang="en-US" sz="1050" dirty="0"/>
-              <a:t>배출 </a:t>
-            </a:r>
-            <a:r>
-              <a:rPr lang="ko-KR" altLang="en-US" sz="1050" dirty="0" err="1"/>
-              <a:t>증감량</a:t>
-            </a:r>
-            <a:endParaRPr lang="ko-KR" altLang="en-US" sz="1050" dirty="0"/>
-          </a:p>
-        </p:txBody>
-      </p:sp>
-      <p:sp>
-        <p:nvSpPr>
-          <p:cNvPr id="36" name="TextBox 35">
-            <a:extLst>
-              <a:ext uri="{FF2B5EF4-FFF2-40B4-BE49-F238E27FC236}">
-                <a16:creationId xmlns:a16="http://schemas.microsoft.com/office/drawing/2014/main" id="{C3923473-5773-4BE8-88E2-91203489BF82}"/>
-              </a:ext>
-            </a:extLst>
-          </p:cNvPr>
-          <p:cNvSpPr txBox="1"/>
-          <p:nvPr/>
-        </p:nvSpPr>
-        <p:spPr>
-          <a:xfrm>
-            <a:off x="4596851" y="1944273"/>
+            <a:off x="3367566" y="1944273"/>
             <a:ext cx="1263512" cy="253916"/>
           </a:xfrm>
           <a:prstGeom prst="rect">
@@ -12963,94 +12195,6 @@
           </a:p>
         </p:txBody>
       </p:sp>
-      <p:sp>
-        <p:nvSpPr>
-          <p:cNvPr id="34" name="TextBox 33">
-            <a:extLst>
-              <a:ext uri="{FF2B5EF4-FFF2-40B4-BE49-F238E27FC236}">
-                <a16:creationId xmlns:a16="http://schemas.microsoft.com/office/drawing/2014/main" id="{AABFDD26-C717-4B2E-B0E1-540A54C1B296}"/>
-              </a:ext>
-            </a:extLst>
-          </p:cNvPr>
-          <p:cNvSpPr txBox="1"/>
-          <p:nvPr/>
-        </p:nvSpPr>
-        <p:spPr>
-          <a:xfrm>
-            <a:off x="3348480" y="1944273"/>
-            <a:ext cx="1112992" cy="253916"/>
-          </a:xfrm>
-          <a:prstGeom prst="rect">
-            <a:avLst/>
-          </a:prstGeom>
-          <a:noFill/>
-          <a:ln>
-            <a:solidFill>
-              <a:schemeClr val="tx1"/>
-            </a:solidFill>
-          </a:ln>
-        </p:spPr>
-        <p:txBody>
-          <a:bodyPr wrap="square" rtlCol="0">
-            <a:spAutoFit/>
-          </a:bodyPr>
-          <a:lstStyle/>
-          <a:p>
-            <a:pPr algn="ctr"/>
-            <a:r>
-              <a:rPr lang="ko-KR" altLang="en-US" sz="1050" dirty="0"/>
-              <a:t>배출 </a:t>
-            </a:r>
-            <a:r>
-              <a:rPr lang="ko-KR" altLang="en-US" sz="1050" dirty="0" err="1"/>
-              <a:t>증감량</a:t>
-            </a:r>
-            <a:endParaRPr lang="ko-KR" altLang="en-US" sz="1050" dirty="0"/>
-          </a:p>
-        </p:txBody>
-      </p:sp>
-      <p:sp>
-        <p:nvSpPr>
-          <p:cNvPr id="36" name="TextBox 35">
-            <a:extLst>
-              <a:ext uri="{FF2B5EF4-FFF2-40B4-BE49-F238E27FC236}">
-                <a16:creationId xmlns:a16="http://schemas.microsoft.com/office/drawing/2014/main" id="{C3923473-5773-4BE8-88E2-91203489BF82}"/>
-              </a:ext>
-            </a:extLst>
-          </p:cNvPr>
-          <p:cNvSpPr txBox="1"/>
-          <p:nvPr/>
-        </p:nvSpPr>
-        <p:spPr>
-          <a:xfrm>
-            <a:off x="4596851" y="1944273"/>
-            <a:ext cx="1263512" cy="253916"/>
-          </a:xfrm>
-          <a:prstGeom prst="rect">
-            <a:avLst/>
-          </a:prstGeom>
-          <a:noFill/>
-          <a:ln>
-            <a:solidFill>
-              <a:schemeClr val="tx1"/>
-            </a:solidFill>
-          </a:ln>
-        </p:spPr>
-        <p:txBody>
-          <a:bodyPr wrap="square" rtlCol="0">
-            <a:spAutoFit/>
-          </a:bodyPr>
-          <a:lstStyle/>
-          <a:p>
-            <a:pPr algn="ctr"/>
-            <a:r>
-              <a:rPr lang="ko-KR" altLang="en-US" sz="1050"/>
-              <a:t>배출규모 점유율</a:t>
-            </a:r>
-            <a:endParaRPr lang="ko-KR" altLang="en-US" sz="1050" dirty="0"/>
-          </a:p>
-        </p:txBody>
-      </p:sp>
       <p:pic>
         <p:nvPicPr>
           <p:cNvPr id="13" name="그림 12">
@@ -13137,6 +12281,48 @@
               <a:rPr lang="ko-KR" altLang="en-US" sz="1050" dirty="0"/>
               <a:t> 연평균 재생에너지 이용률</a:t>
             </a:r>
+          </a:p>
+        </p:txBody>
+      </p:sp>
+      <p:sp>
+        <p:nvSpPr>
+          <p:cNvPr id="16" name="TextBox 15">
+            <a:extLst>
+              <a:ext uri="{FF2B5EF4-FFF2-40B4-BE49-F238E27FC236}">
+                <a16:creationId xmlns:a16="http://schemas.microsoft.com/office/drawing/2014/main" id="{290542D9-BE87-4450-8FB5-E70C8AD3578B}"/>
+              </a:ext>
+            </a:extLst>
+          </p:cNvPr>
+          <p:cNvSpPr txBox="1"/>
+          <p:nvPr/>
+        </p:nvSpPr>
+        <p:spPr>
+          <a:xfrm>
+            <a:off x="3367566" y="1944273"/>
+            <a:ext cx="1263512" cy="253916"/>
+          </a:xfrm>
+          <a:prstGeom prst="rect">
+            <a:avLst/>
+          </a:prstGeom>
+          <a:noFill/>
+          <a:ln>
+            <a:solidFill>
+              <a:schemeClr val="tx1"/>
+            </a:solidFill>
+          </a:ln>
+        </p:spPr>
+        <p:txBody>
+          <a:bodyPr wrap="square" rtlCol="0">
+            <a:spAutoFit/>
+          </a:bodyPr>
+          <a:lstStyle/>
+          <a:p>
+            <a:pPr algn="ctr"/>
+            <a:r>
+              <a:rPr lang="ko-KR" altLang="en-US" sz="1050"/>
+              <a:t>배출규모 점유율</a:t>
+            </a:r>
+            <a:endParaRPr lang="ko-KR" altLang="en-US" sz="1050" dirty="0"/>
           </a:p>
         </p:txBody>
       </p:sp>
